--- a/decks/maths-perimeter-area/maths-perimeter-area_ch4_area-triangle.pptx
+++ b/decks/maths-perimeter-area/maths-perimeter-area_ch4_area-triangle.pptx
@@ -121,28 +121,28 @@
   <p:extLst>
     <p:ext uri="{521415D9-36F7-43E2-AB2F-B90AF26B5E84}">
       <p14:sectionLst xmlns:p14="http://schemas.microsoft.com/office/powerpoint/2010/main">
-        <p14:section name="Opening" id="{6d1ee9a7-924e-2582-d662-28ef0ebc745a}">
+        <p14:section name="Opening" id="{0547f1bf-6f2b-1c88-9de2-690fbd3a6714}">
           <p14:sldIdLst>
             <p14:sldId id="256"/>
           </p14:sldIdLst>
         </p14:section>
-        <p14:section name="Gate" id="{b80fc71c-6df8-60e2-2641-25f943ce94c5}">
+        <p14:section name="Gate" id="{e56efc97-58a4-9062-1af9-0b30ed793cce}">
           <p14:sldIdLst>
             <p14:sldId id="257"/>
             <p14:sldId id="258"/>
           </p14:sldIdLst>
         </p14:section>
-        <p14:section name="Pre-teach" id="{c831abb0-9fcb-653b-9bc3-f04e1f9c817b}">
+        <p14:section name="Pre-teach" id="{c12a4c5f-5e25-a064-b7cf-f7d12b171276}">
           <p14:sldIdLst>
             <p14:sldId id="259"/>
           </p14:sldIdLst>
         </p14:section>
-        <p14:section name="Read-along" id="{c91a816b-eb63-c542-8529-f1e67e5674e7}">
+        <p14:section name="Read-along" id="{c999d067-dc1c-3dfc-27a0-c2adc4b104f8}">
           <p14:sldIdLst>
             <p14:sldId id="260"/>
           </p14:sldIdLst>
         </p14:section>
-        <p14:section name="Teach" id="{a59c899f-cccd-2d68-9af9-1b897cb46986}">
+        <p14:section name="Teach" id="{b83137ed-0121-ba8d-9760-500c7975e5fc}">
           <p14:sldIdLst>
             <p14:sldId id="261"/>
             <p14:sldId id="262"/>
@@ -150,18 +150,18 @@
             <p14:sldId id="264"/>
           </p14:sldIdLst>
         </p14:section>
-        <p14:section name="Routes" id="{223d893e-0560-e255-7c29-842f74fc3d66}">
+        <p14:section name="Routes" id="{17dba69a-65fb-0867-5dc6-c43860028819}">
           <p14:sldIdLst>
             <p14:sldId id="265"/>
             <p14:sldId id="266"/>
           </p14:sldIdLst>
         </p14:section>
-        <p14:section name="Close" id="{71337747-e387-5778-cc6d-4b1121e1d28a}">
+        <p14:section name="Close" id="{a47d1af5-eebe-1cfe-e417-7378da62cf52}">
           <p14:sldIdLst>
             <p14:sldId id="267"/>
           </p14:sldIdLst>
         </p14:section>
-        <p14:section name="Answers" id="{ee50908b-f8b6-d725-0c46-08747e8ffae3}">
+        <p14:section name="Answers" id="{e4a4e71e-0d5b-4a02-9482-4e27fdd08420}">
           <p14:sldIdLst>
             <p14:sldId id="268"/>
             <p14:sldId id="269"/>
@@ -1035,7 +1035,7 @@
             <a:r>
               <a:rPr lang="en-US" dirty="0"/>
               <a:t>Answers — task 2: Choose the right height. Reveal the answer; pupils mark their own work in a different colour, then read the "why" together. Same destination for every lane, so one answer serves the whole class.
-Answer: A   30 cm²
+Answer: D   30 cm²
 Why: Only the base and the perpendicular height matter: 12 × 5 = 60, and 60 ÷ 2 = 30.
 Ask a Support pupil to explain one step, and a Stretch pupil to share their extension.</a:t>
             </a:r>
@@ -4818,7 +4818,7 @@
                 <a:ea typeface="Calibri" pitchFamily="34" charset="-122"/>
                 <a:cs typeface="Calibri" pitchFamily="34" charset="-120"/>
               </a:rPr>
-              <a:t>30 cm²      </a:t>
+              <a:t>42 cm²      </a:t>
             </a:r>
             <a:pPr algn="ctr" indent="0" marL="0">
               <a:buNone/>
@@ -4846,7 +4846,7 @@
                 <a:ea typeface="Calibri" pitchFamily="34" charset="-122"/>
                 <a:cs typeface="Calibri" pitchFamily="34" charset="-120"/>
               </a:rPr>
-              <a:t>42 cm²      </a:t>
+              <a:t>60 cm²      </a:t>
             </a:r>
             <a:pPr algn="ctr" indent="0" marL="0">
               <a:buNone/>
@@ -4902,7 +4902,7 @@
                 <a:ea typeface="Calibri" pitchFamily="34" charset="-122"/>
                 <a:cs typeface="Calibri" pitchFamily="34" charset="-120"/>
               </a:rPr>
-              <a:t>60 cm²</a:t>
+              <a:t>30 cm²</a:t>
             </a:r>
             <a:endParaRPr lang="en-US" sz="2000" dirty="0"/>
           </a:p>
@@ -6719,7 +6719,7 @@
                 <a:ea typeface="Cambria" pitchFamily="34" charset="-122"/>
                 <a:cs typeface="Cambria" pitchFamily="34" charset="-120"/>
               </a:rPr>
-              <a:t>A   30 cm²</a:t>
+              <a:t>D   30 cm²</a:t>
             </a:r>
             <a:endParaRPr lang="en-US" sz="1800" dirty="0"/>
           </a:p>
@@ -7910,7 +7910,7 @@
                 <a:ea typeface="Calibri" pitchFamily="34" charset="-122"/>
                 <a:cs typeface="Calibri" pitchFamily="34" charset="-120"/>
               </a:rPr>
-              <a:t>Because a triangle has three sides</a:t>
+              <a:t>Because the height is always half the base</a:t>
             </a:r>
             <a:endParaRPr lang="en-US" sz="2000" dirty="0"/>
           </a:p>
@@ -7984,7 +7984,7 @@
                 <a:ea typeface="Calibri" pitchFamily="34" charset="-122"/>
                 <a:cs typeface="Calibri" pitchFamily="34" charset="-120"/>
               </a:rPr>
-              <a:t>Because the height is always half the base</a:t>
+              <a:t>Because a triangle has three sides</a:t>
             </a:r>
             <a:endParaRPr lang="en-US" sz="2000" dirty="0"/>
           </a:p>

--- a/decks/maths-perimeter-area/maths-perimeter-area_ch4_area-triangle.pptx
+++ b/decks/maths-perimeter-area/maths-perimeter-area_ch4_area-triangle.pptx
@@ -121,28 +121,28 @@
   <p:extLst>
     <p:ext uri="{521415D9-36F7-43E2-AB2F-B90AF26B5E84}">
       <p14:sectionLst xmlns:p14="http://schemas.microsoft.com/office/powerpoint/2010/main">
-        <p14:section name="Opening" id="{0547f1bf-6f2b-1c88-9de2-690fbd3a6714}">
+        <p14:section name="Opening" id="{39e6d1f4-6a07-f954-4cc3-587137ca8388}">
           <p14:sldIdLst>
             <p14:sldId id="256"/>
           </p14:sldIdLst>
         </p14:section>
-        <p14:section name="Gate" id="{e56efc97-58a4-9062-1af9-0b30ed793cce}">
+        <p14:section name="Gate" id="{d922da2d-d277-6b7c-7efe-72160ea0eb5f}">
           <p14:sldIdLst>
             <p14:sldId id="257"/>
             <p14:sldId id="258"/>
           </p14:sldIdLst>
         </p14:section>
-        <p14:section name="Pre-teach" id="{c12a4c5f-5e25-a064-b7cf-f7d12b171276}">
+        <p14:section name="Pre-teach" id="{0f4a1524-a068-57a2-af69-a8d993030c86}">
           <p14:sldIdLst>
             <p14:sldId id="259"/>
           </p14:sldIdLst>
         </p14:section>
-        <p14:section name="Read-along" id="{c999d067-dc1c-3dfc-27a0-c2adc4b104f8}">
+        <p14:section name="Read-along" id="{7333ac6a-c227-ec5c-3e83-4c08b45d5cc0}">
           <p14:sldIdLst>
             <p14:sldId id="260"/>
           </p14:sldIdLst>
         </p14:section>
-        <p14:section name="Teach" id="{b83137ed-0121-ba8d-9760-500c7975e5fc}">
+        <p14:section name="Teach" id="{88154ab8-8479-c12f-f05a-5ec06275b6f3}">
           <p14:sldIdLst>
             <p14:sldId id="261"/>
             <p14:sldId id="262"/>
@@ -150,18 +150,18 @@
             <p14:sldId id="264"/>
           </p14:sldIdLst>
         </p14:section>
-        <p14:section name="Routes" id="{17dba69a-65fb-0867-5dc6-c43860028819}">
+        <p14:section name="Routes" id="{c08b0907-312f-311f-49b3-c698ce7682e0}">
           <p14:sldIdLst>
             <p14:sldId id="265"/>
             <p14:sldId id="266"/>
           </p14:sldIdLst>
         </p14:section>
-        <p14:section name="Close" id="{a47d1af5-eebe-1cfe-e417-7378da62cf52}">
+        <p14:section name="Close" id="{a1f9368b-81e3-ad58-42d4-081ade343005}">
           <p14:sldIdLst>
             <p14:sldId id="267"/>
           </p14:sldIdLst>
         </p14:section>
-        <p14:section name="Answers" id="{e4a4e71e-0d5b-4a02-9482-4e27fdd08420}">
+        <p14:section name="Answers" id="{72a125e8-cad0-a0f0-cf1e-2652687d33b9}">
           <p14:sldIdLst>
             <p14:sldId id="268"/>
             <p14:sldId id="269"/>
